--- a/Final/Figures/wavepacket_l=0.pptx
+++ b/Final/Figures/wavepacket_l=0.pptx
@@ -253,7 +253,7 @@
           <a:p>
             <a:fld id="{B4A272A4-1B6B-4C0A-B74D-70EF2D8C7D55}" type="datetimeFigureOut">
               <a:rPr lang="zh-TW" altLang="en-US" smtClean="0"/>
-              <a:t>2026/7/16</a:t>
+              <a:t>2026/10/6</a:t>
             </a:fld>
             <a:endParaRPr lang="zh-TW" altLang="en-US"/>
           </a:p>
@@ -423,7 +423,7 @@
           <a:p>
             <a:fld id="{B4A272A4-1B6B-4C0A-B74D-70EF2D8C7D55}" type="datetimeFigureOut">
               <a:rPr lang="zh-TW" altLang="en-US" smtClean="0"/>
-              <a:t>2026/7/16</a:t>
+              <a:t>2026/10/6</a:t>
             </a:fld>
             <a:endParaRPr lang="zh-TW" altLang="en-US"/>
           </a:p>
@@ -603,7 +603,7 @@
           <a:p>
             <a:fld id="{B4A272A4-1B6B-4C0A-B74D-70EF2D8C7D55}" type="datetimeFigureOut">
               <a:rPr lang="zh-TW" altLang="en-US" smtClean="0"/>
-              <a:t>2026/7/16</a:t>
+              <a:t>2026/10/6</a:t>
             </a:fld>
             <a:endParaRPr lang="zh-TW" altLang="en-US"/>
           </a:p>
@@ -773,7 +773,7 @@
           <a:p>
             <a:fld id="{B4A272A4-1B6B-4C0A-B74D-70EF2D8C7D55}" type="datetimeFigureOut">
               <a:rPr lang="zh-TW" altLang="en-US" smtClean="0"/>
-              <a:t>2026/7/16</a:t>
+              <a:t>2026/10/6</a:t>
             </a:fld>
             <a:endParaRPr lang="zh-TW" altLang="en-US"/>
           </a:p>
@@ -1017,7 +1017,7 @@
           <a:p>
             <a:fld id="{B4A272A4-1B6B-4C0A-B74D-70EF2D8C7D55}" type="datetimeFigureOut">
               <a:rPr lang="zh-TW" altLang="en-US" smtClean="0"/>
-              <a:t>2026/7/16</a:t>
+              <a:t>2026/10/6</a:t>
             </a:fld>
             <a:endParaRPr lang="zh-TW" altLang="en-US"/>
           </a:p>
@@ -1249,7 +1249,7 @@
           <a:p>
             <a:fld id="{B4A272A4-1B6B-4C0A-B74D-70EF2D8C7D55}" type="datetimeFigureOut">
               <a:rPr lang="zh-TW" altLang="en-US" smtClean="0"/>
-              <a:t>2026/7/16</a:t>
+              <a:t>2026/10/6</a:t>
             </a:fld>
             <a:endParaRPr lang="zh-TW" altLang="en-US"/>
           </a:p>
@@ -1616,7 +1616,7 @@
           <a:p>
             <a:fld id="{B4A272A4-1B6B-4C0A-B74D-70EF2D8C7D55}" type="datetimeFigureOut">
               <a:rPr lang="zh-TW" altLang="en-US" smtClean="0"/>
-              <a:t>2026/7/16</a:t>
+              <a:t>2026/10/6</a:t>
             </a:fld>
             <a:endParaRPr lang="zh-TW" altLang="en-US"/>
           </a:p>
@@ -1734,7 +1734,7 @@
           <a:p>
             <a:fld id="{B4A272A4-1B6B-4C0A-B74D-70EF2D8C7D55}" type="datetimeFigureOut">
               <a:rPr lang="zh-TW" altLang="en-US" smtClean="0"/>
-              <a:t>2026/7/16</a:t>
+              <a:t>2026/10/6</a:t>
             </a:fld>
             <a:endParaRPr lang="zh-TW" altLang="en-US"/>
           </a:p>
@@ -1829,7 +1829,7 @@
           <a:p>
             <a:fld id="{B4A272A4-1B6B-4C0A-B74D-70EF2D8C7D55}" type="datetimeFigureOut">
               <a:rPr lang="zh-TW" altLang="en-US" smtClean="0"/>
-              <a:t>2026/7/16</a:t>
+              <a:t>2026/10/6</a:t>
             </a:fld>
             <a:endParaRPr lang="zh-TW" altLang="en-US"/>
           </a:p>
@@ -2106,7 +2106,7 @@
           <a:p>
             <a:fld id="{B4A272A4-1B6B-4C0A-B74D-70EF2D8C7D55}" type="datetimeFigureOut">
               <a:rPr lang="zh-TW" altLang="en-US" smtClean="0"/>
-              <a:t>2026/7/16</a:t>
+              <a:t>2026/10/6</a:t>
             </a:fld>
             <a:endParaRPr lang="zh-TW" altLang="en-US"/>
           </a:p>
@@ -2363,7 +2363,7 @@
           <a:p>
             <a:fld id="{B4A272A4-1B6B-4C0A-B74D-70EF2D8C7D55}" type="datetimeFigureOut">
               <a:rPr lang="zh-TW" altLang="en-US" smtClean="0"/>
-              <a:t>2026/7/16</a:t>
+              <a:t>2026/10/6</a:t>
             </a:fld>
             <a:endParaRPr lang="zh-TW" altLang="en-US"/>
           </a:p>
@@ -2576,7 +2576,7 @@
           <a:p>
             <a:fld id="{B4A272A4-1B6B-4C0A-B74D-70EF2D8C7D55}" type="datetimeFigureOut">
               <a:rPr lang="zh-TW" altLang="en-US" smtClean="0"/>
-              <a:t>2026/7/16</a:t>
+              <a:t>2026/10/6</a:t>
             </a:fld>
             <a:endParaRPr lang="zh-TW" altLang="en-US"/>
           </a:p>
@@ -11943,10 +11943,10 @@
       </p:sp>
       <p:pic>
         <p:nvPicPr>
-          <p:cNvPr id="63" name="圖片 62">
+          <p:cNvPr id="94" name="圖片 93">
             <a:extLst>
               <a:ext uri="{FF2B5EF4-FFF2-40B4-BE49-F238E27FC236}">
-                <a16:creationId xmlns:a16="http://schemas.microsoft.com/office/drawing/2014/main" id="{DCB1C2BC-0169-4480-B1DC-D5B78BA0A5F7}"/>
+                <a16:creationId xmlns:a16="http://schemas.microsoft.com/office/drawing/2014/main" id="{5E85E9CC-B58F-4AA4-9E27-79BF346AD6E7}"/>
               </a:ext>
             </a:extLst>
           </p:cNvPr>
@@ -11955,7 +11955,7 @@
           </p:cNvPicPr>
           <p:nvPr/>
         </p:nvPicPr>
-        <p:blipFill rotWithShape="1">
+        <p:blipFill>
           <a:blip r:embed="rId2">
             <a:clrChange>
               <a:clrFrom>
@@ -11967,64 +11967,15 @@
                 </a:srgbClr>
               </a:clrTo>
             </a:clrChange>
-            <a:extLst>
-              <a:ext uri="{28A0092B-C50C-407E-A947-70E740481C1C}">
-                <a14:useLocalDpi xmlns:a14="http://schemas.microsoft.com/office/drawing/2010/main" val="0"/>
-              </a:ext>
-            </a:extLst>
           </a:blip>
-          <a:srcRect t="14496" b="55006"/>
-          <a:stretch/>
+          <a:stretch>
+            <a:fillRect/>
+          </a:stretch>
         </p:blipFill>
         <p:spPr>
           <a:xfrm>
-            <a:off x="2615247" y="1917593"/>
-            <a:ext cx="2246939" cy="1370513"/>
-          </a:xfrm>
-          <a:prstGeom prst="rect">
-            <a:avLst/>
-          </a:prstGeom>
-        </p:spPr>
-      </p:pic>
-      <p:pic>
-        <p:nvPicPr>
-          <p:cNvPr id="64" name="圖片 63">
-            <a:extLst>
-              <a:ext uri="{FF2B5EF4-FFF2-40B4-BE49-F238E27FC236}">
-                <a16:creationId xmlns:a16="http://schemas.microsoft.com/office/drawing/2014/main" id="{39945702-86A4-440F-8EAE-345078CD1918}"/>
-              </a:ext>
-            </a:extLst>
-          </p:cNvPr>
-          <p:cNvPicPr>
-            <a:picLocks noChangeAspect="1"/>
-          </p:cNvPicPr>
-          <p:nvPr/>
-        </p:nvPicPr>
-        <p:blipFill rotWithShape="1">
-          <a:blip r:embed="rId3">
-            <a:clrChange>
-              <a:clrFrom>
-                <a:srgbClr val="FFFFFF"/>
-              </a:clrFrom>
-              <a:clrTo>
-                <a:srgbClr val="FFFFFF">
-                  <a:alpha val="0"/>
-                </a:srgbClr>
-              </a:clrTo>
-            </a:clrChange>
-            <a:extLst>
-              <a:ext uri="{28A0092B-C50C-407E-A947-70E740481C1C}">
-                <a14:useLocalDpi xmlns:a14="http://schemas.microsoft.com/office/drawing/2010/main" val="0"/>
-              </a:ext>
-            </a:extLst>
-          </a:blip>
-          <a:srcRect t="61804" b="6188"/>
-          <a:stretch/>
-        </p:blipFill>
-        <p:spPr>
-          <a:xfrm>
-            <a:off x="2613753" y="3581666"/>
-            <a:ext cx="2246939" cy="1438397"/>
+            <a:off x="2746375" y="2227514"/>
+            <a:ext cx="2006600" cy="2833749"/>
           </a:xfrm>
           <a:prstGeom prst="rect">
             <a:avLst/>
@@ -13694,8 +13645,8 @@
           </a:p>
         </p:txBody>
       </p:sp>
-      <mc:AlternateContent xmlns:mc="http://schemas.openxmlformats.org/markup-compatibility/2006" xmlns:a14="http://schemas.microsoft.com/office/drawing/2010/main">
-        <mc:Choice Requires="a14">
+      <mc:AlternateContent xmlns:mc="http://schemas.openxmlformats.org/markup-compatibility/2006">
+        <mc:Choice xmlns:a14="http://schemas.microsoft.com/office/drawing/2010/main" Requires="a14">
           <p:sp>
             <p:nvSpPr>
               <p:cNvPr id="118" name="矩形 117">
@@ -13710,7 +13661,7 @@
             </p:nvSpPr>
             <p:spPr>
               <a:xfrm>
-                <a:off x="-22836" y="7182919"/>
+                <a:off x="-22836" y="7116306"/>
                 <a:ext cx="905761" cy="400110"/>
               </a:xfrm>
               <a:prstGeom prst="rect">
@@ -13759,7 +13710,7 @@
             </p:txBody>
           </p:sp>
         </mc:Choice>
-        <mc:Fallback xmlns="">
+        <mc:Fallback>
           <p:sp>
             <p:nvSpPr>
               <p:cNvPr id="118" name="矩形 117">
@@ -13776,14 +13727,14 @@
             </p:nvSpPr>
             <p:spPr>
               <a:xfrm>
-                <a:off x="-22836" y="7182919"/>
+                <a:off x="-22836" y="7116306"/>
                 <a:ext cx="905761" cy="400110"/>
               </a:xfrm>
               <a:prstGeom prst="rect">
                 <a:avLst/>
               </a:prstGeom>
               <a:blipFill>
-                <a:blip r:embed="rId21"/>
+                <a:blip r:embed="rId19"/>
                 <a:stretch>
                   <a:fillRect/>
                 </a:stretch>
@@ -13804,8 +13755,8 @@
           </p:sp>
         </mc:Fallback>
       </mc:AlternateContent>
-      <mc:AlternateContent xmlns:mc="http://schemas.openxmlformats.org/markup-compatibility/2006" xmlns:a14="http://schemas.microsoft.com/office/drawing/2010/main">
-        <mc:Choice Requires="a14">
+      <mc:AlternateContent xmlns:mc="http://schemas.openxmlformats.org/markup-compatibility/2006">
+        <mc:Choice xmlns:a14="http://schemas.microsoft.com/office/drawing/2010/main" Requires="a14">
           <p:sp>
             <p:nvSpPr>
               <p:cNvPr id="119" name="矩形 118">
@@ -13820,7 +13771,7 @@
             </p:nvSpPr>
             <p:spPr>
               <a:xfrm>
-                <a:off x="-48472" y="8709411"/>
+                <a:off x="-48472" y="8642798"/>
                 <a:ext cx="963725" cy="400110"/>
               </a:xfrm>
               <a:prstGeom prst="rect">
@@ -13875,7 +13826,7 @@
             </p:txBody>
           </p:sp>
         </mc:Choice>
-        <mc:Fallback xmlns="">
+        <mc:Fallback>
           <p:sp>
             <p:nvSpPr>
               <p:cNvPr id="119" name="矩形 118">
@@ -13892,14 +13843,14 @@
             </p:nvSpPr>
             <p:spPr>
               <a:xfrm>
-                <a:off x="-48472" y="8709411"/>
+                <a:off x="-48472" y="8642798"/>
                 <a:ext cx="963725" cy="400110"/>
               </a:xfrm>
               <a:prstGeom prst="rect">
                 <a:avLst/>
               </a:prstGeom>
               <a:blipFill>
-                <a:blip r:embed="rId22"/>
+                <a:blip r:embed="rId20"/>
                 <a:stretch>
                   <a:fillRect/>
                 </a:stretch>
@@ -14060,8 +14011,8 @@
           </a:p>
         </p:txBody>
       </p:sp>
-      <mc:AlternateContent xmlns:mc="http://schemas.openxmlformats.org/markup-compatibility/2006" xmlns:a14="http://schemas.microsoft.com/office/drawing/2010/main">
-        <mc:Choice Requires="a14">
+      <mc:AlternateContent xmlns:mc="http://schemas.openxmlformats.org/markup-compatibility/2006">
+        <mc:Choice xmlns:a14="http://schemas.microsoft.com/office/drawing/2010/main" Requires="a14">
           <p:sp>
             <p:nvSpPr>
               <p:cNvPr id="138" name="矩形 137">
@@ -14076,7 +14027,7 @@
             </p:nvSpPr>
             <p:spPr>
               <a:xfrm>
-                <a:off x="4935674" y="7180254"/>
+                <a:off x="4935674" y="7113641"/>
                 <a:ext cx="905761" cy="400110"/>
               </a:xfrm>
               <a:prstGeom prst="rect">
@@ -14125,7 +14076,7 @@
             </p:txBody>
           </p:sp>
         </mc:Choice>
-        <mc:Fallback xmlns="">
+        <mc:Fallback>
           <p:sp>
             <p:nvSpPr>
               <p:cNvPr id="138" name="矩形 137">
@@ -14142,14 +14093,14 @@
             </p:nvSpPr>
             <p:spPr>
               <a:xfrm>
-                <a:off x="4935674" y="7180254"/>
+                <a:off x="4935674" y="7113641"/>
                 <a:ext cx="905761" cy="400110"/>
               </a:xfrm>
               <a:prstGeom prst="rect">
                 <a:avLst/>
               </a:prstGeom>
               <a:blipFill>
-                <a:blip r:embed="rId25"/>
+                <a:blip r:embed="rId21"/>
                 <a:stretch>
                   <a:fillRect/>
                 </a:stretch>
@@ -14170,8 +14121,8 @@
           </p:sp>
         </mc:Fallback>
       </mc:AlternateContent>
-      <mc:AlternateContent xmlns:mc="http://schemas.openxmlformats.org/markup-compatibility/2006" xmlns:a14="http://schemas.microsoft.com/office/drawing/2010/main">
-        <mc:Choice Requires="a14">
+      <mc:AlternateContent xmlns:mc="http://schemas.openxmlformats.org/markup-compatibility/2006">
+        <mc:Choice xmlns:a14="http://schemas.microsoft.com/office/drawing/2010/main" Requires="a14">
           <p:sp>
             <p:nvSpPr>
               <p:cNvPr id="139" name="矩形 138">
@@ -14186,7 +14137,7 @@
             </p:nvSpPr>
             <p:spPr>
               <a:xfrm>
-                <a:off x="4910038" y="8706746"/>
+                <a:off x="4910038" y="8640133"/>
                 <a:ext cx="963725" cy="400110"/>
               </a:xfrm>
               <a:prstGeom prst="rect">
@@ -14241,7 +14192,7 @@
             </p:txBody>
           </p:sp>
         </mc:Choice>
-        <mc:Fallback xmlns="">
+        <mc:Fallback>
           <p:sp>
             <p:nvSpPr>
               <p:cNvPr id="139" name="矩形 138">
@@ -14258,14 +14209,14 @@
             </p:nvSpPr>
             <p:spPr>
               <a:xfrm>
-                <a:off x="4910038" y="8706746"/>
+                <a:off x="4910038" y="8640133"/>
                 <a:ext cx="963725" cy="400110"/>
               </a:xfrm>
               <a:prstGeom prst="rect">
                 <a:avLst/>
               </a:prstGeom>
               <a:blipFill>
-                <a:blip r:embed="rId26"/>
+                <a:blip r:embed="rId22"/>
                 <a:stretch>
                   <a:fillRect/>
                 </a:stretch>
@@ -14286,231 +14237,6 @@
           </p:sp>
         </mc:Fallback>
       </mc:AlternateContent>
-      <p:pic>
-        <p:nvPicPr>
-          <p:cNvPr id="148" name="圖片 147">
-            <a:extLst>
-              <a:ext uri="{FF2B5EF4-FFF2-40B4-BE49-F238E27FC236}">
-                <a16:creationId xmlns:a16="http://schemas.microsoft.com/office/drawing/2014/main" id="{0AF683EF-DC1A-46BB-BE4A-26ED9236279F}"/>
-              </a:ext>
-            </a:extLst>
-          </p:cNvPr>
-          <p:cNvPicPr>
-            <a:picLocks noChangeAspect="1"/>
-          </p:cNvPicPr>
-          <p:nvPr/>
-        </p:nvPicPr>
-        <p:blipFill rotWithShape="1">
-          <a:blip r:embed="rId27">
-            <a:clrChange>
-              <a:clrFrom>
-                <a:srgbClr val="FFFFFF"/>
-              </a:clrFrom>
-              <a:clrTo>
-                <a:srgbClr val="FFFFFF">
-                  <a:alpha val="0"/>
-                </a:srgbClr>
-              </a:clrTo>
-            </a:clrChange>
-            <a:extLst>
-              <a:ext uri="{28A0092B-C50C-407E-A947-70E740481C1C}">
-                <a14:useLocalDpi xmlns:a14="http://schemas.microsoft.com/office/drawing/2010/main" val="0"/>
-              </a:ext>
-            </a:extLst>
-          </a:blip>
-          <a:srcRect t="13293" b="54478"/>
-          <a:stretch/>
-        </p:blipFill>
-        <p:spPr>
-          <a:xfrm>
-            <a:off x="7572104" y="1862817"/>
-            <a:ext cx="2246400" cy="1448017"/>
-          </a:xfrm>
-          <a:prstGeom prst="rect">
-            <a:avLst/>
-          </a:prstGeom>
-        </p:spPr>
-      </p:pic>
-      <p:pic>
-        <p:nvPicPr>
-          <p:cNvPr id="149" name="圖片 148">
-            <a:extLst>
-              <a:ext uri="{FF2B5EF4-FFF2-40B4-BE49-F238E27FC236}">
-                <a16:creationId xmlns:a16="http://schemas.microsoft.com/office/drawing/2014/main" id="{F943ED23-3740-49E3-A7EA-55D2C2040E6A}"/>
-              </a:ext>
-            </a:extLst>
-          </p:cNvPr>
-          <p:cNvPicPr>
-            <a:picLocks noChangeAspect="1"/>
-          </p:cNvPicPr>
-          <p:nvPr/>
-        </p:nvPicPr>
-        <p:blipFill rotWithShape="1">
-          <a:blip r:embed="rId28">
-            <a:clrChange>
-              <a:clrFrom>
-                <a:srgbClr val="FFFFFF"/>
-              </a:clrFrom>
-              <a:clrTo>
-                <a:srgbClr val="FFFFFF">
-                  <a:alpha val="0"/>
-                </a:srgbClr>
-              </a:clrTo>
-            </a:clrChange>
-            <a:extLst>
-              <a:ext uri="{28A0092B-C50C-407E-A947-70E740481C1C}">
-                <a14:useLocalDpi xmlns:a14="http://schemas.microsoft.com/office/drawing/2010/main" val="0"/>
-              </a:ext>
-            </a:extLst>
-          </a:blip>
-          <a:srcRect t="38148" b="9630"/>
-          <a:stretch/>
-        </p:blipFill>
-        <p:spPr>
-          <a:xfrm>
-            <a:off x="5774028" y="1896096"/>
-            <a:ext cx="2019600" cy="3165604"/>
-          </a:xfrm>
-          <a:prstGeom prst="rect">
-            <a:avLst/>
-          </a:prstGeom>
-        </p:spPr>
-      </p:pic>
-      <p:pic>
-        <p:nvPicPr>
-          <p:cNvPr id="150" name="圖片 149">
-            <a:extLst>
-              <a:ext uri="{FF2B5EF4-FFF2-40B4-BE49-F238E27FC236}">
-                <a16:creationId xmlns:a16="http://schemas.microsoft.com/office/drawing/2014/main" id="{E60AD9D3-5D98-49D9-84C3-A77B77FC1378}"/>
-              </a:ext>
-            </a:extLst>
-          </p:cNvPr>
-          <p:cNvPicPr>
-            <a:picLocks noChangeAspect="1"/>
-          </p:cNvPicPr>
-          <p:nvPr/>
-        </p:nvPicPr>
-        <p:blipFill rotWithShape="1">
-          <a:blip r:embed="rId29">
-            <a:clrChange>
-              <a:clrFrom>
-                <a:srgbClr val="FFFFFF"/>
-              </a:clrFrom>
-              <a:clrTo>
-                <a:srgbClr val="FFFFFF">
-                  <a:alpha val="0"/>
-                </a:srgbClr>
-              </a:clrTo>
-            </a:clrChange>
-            <a:extLst>
-              <a:ext uri="{28A0092B-C50C-407E-A947-70E740481C1C}">
-                <a14:useLocalDpi xmlns:a14="http://schemas.microsoft.com/office/drawing/2010/main" val="0"/>
-              </a:ext>
-            </a:extLst>
-          </a:blip>
-          <a:srcRect t="62950" b="6319"/>
-          <a:stretch/>
-        </p:blipFill>
-        <p:spPr>
-          <a:xfrm>
-            <a:off x="7569257" y="3626073"/>
-            <a:ext cx="2246400" cy="1380667"/>
-          </a:xfrm>
-          <a:prstGeom prst="rect">
-            <a:avLst/>
-          </a:prstGeom>
-        </p:spPr>
-      </p:pic>
-      <p:pic>
-        <p:nvPicPr>
-          <p:cNvPr id="151" name="圖片 150">
-            <a:extLst>
-              <a:ext uri="{FF2B5EF4-FFF2-40B4-BE49-F238E27FC236}">
-                <a16:creationId xmlns:a16="http://schemas.microsoft.com/office/drawing/2014/main" id="{8C84E35F-BCC2-45E3-9DB6-43CE5D7DBF00}"/>
-              </a:ext>
-            </a:extLst>
-          </p:cNvPr>
-          <p:cNvPicPr>
-            <a:picLocks noChangeAspect="1"/>
-          </p:cNvPicPr>
-          <p:nvPr/>
-        </p:nvPicPr>
-        <p:blipFill rotWithShape="1">
-          <a:blip r:embed="rId30">
-            <a:clrChange>
-              <a:clrFrom>
-                <a:srgbClr val="FFFFFF"/>
-              </a:clrFrom>
-              <a:clrTo>
-                <a:srgbClr val="FFFFFF">
-                  <a:alpha val="0"/>
-                </a:srgbClr>
-              </a:clrTo>
-            </a:clrChange>
-            <a:extLst>
-              <a:ext uri="{28A0092B-C50C-407E-A947-70E740481C1C}">
-                <a14:useLocalDpi xmlns:a14="http://schemas.microsoft.com/office/drawing/2010/main" val="0"/>
-              </a:ext>
-            </a:extLst>
-          </a:blip>
-          <a:srcRect t="11883" b="52601"/>
-          <a:stretch/>
-        </p:blipFill>
-        <p:spPr>
-          <a:xfrm>
-            <a:off x="2611463" y="6440722"/>
-            <a:ext cx="2246400" cy="1595676"/>
-          </a:xfrm>
-          <a:prstGeom prst="rect">
-            <a:avLst/>
-          </a:prstGeom>
-        </p:spPr>
-      </p:pic>
-      <p:pic>
-        <p:nvPicPr>
-          <p:cNvPr id="152" name="圖片 151">
-            <a:extLst>
-              <a:ext uri="{FF2B5EF4-FFF2-40B4-BE49-F238E27FC236}">
-                <a16:creationId xmlns:a16="http://schemas.microsoft.com/office/drawing/2014/main" id="{9F6B631C-71C0-4B7F-A74F-868F25176BFD}"/>
-              </a:ext>
-            </a:extLst>
-          </p:cNvPr>
-          <p:cNvPicPr>
-            <a:picLocks noChangeAspect="1"/>
-          </p:cNvPicPr>
-          <p:nvPr/>
-        </p:nvPicPr>
-        <p:blipFill rotWithShape="1">
-          <a:blip r:embed="rId31">
-            <a:clrChange>
-              <a:clrFrom>
-                <a:srgbClr val="FFFFFF"/>
-              </a:clrFrom>
-              <a:clrTo>
-                <a:srgbClr val="FFFFFF">
-                  <a:alpha val="0"/>
-                </a:srgbClr>
-              </a:clrTo>
-            </a:clrChange>
-            <a:extLst>
-              <a:ext uri="{28A0092B-C50C-407E-A947-70E740481C1C}">
-                <a14:useLocalDpi xmlns:a14="http://schemas.microsoft.com/office/drawing/2010/main" val="0"/>
-              </a:ext>
-            </a:extLst>
-          </a:blip>
-          <a:srcRect t="37682" b="10546"/>
-          <a:stretch/>
-        </p:blipFill>
-        <p:spPr>
-          <a:xfrm>
-            <a:off x="808045" y="6509598"/>
-            <a:ext cx="2019600" cy="3136719"/>
-          </a:xfrm>
-          <a:prstGeom prst="rect">
-            <a:avLst/>
-          </a:prstGeom>
-        </p:spPr>
-      </p:pic>
       <p:sp>
         <p:nvSpPr>
           <p:cNvPr id="153" name="矩形 152">
@@ -14525,7 +14251,7 @@
         </p:nvSpPr>
         <p:spPr>
           <a:xfrm>
-            <a:off x="1185643" y="8597798"/>
+            <a:off x="1330022" y="8597798"/>
             <a:ext cx="1096724" cy="627999"/>
           </a:xfrm>
           <a:prstGeom prst="rect">
@@ -14615,96 +14341,6 @@
           </a:p>
         </p:txBody>
       </p:sp>
-      <p:pic>
-        <p:nvPicPr>
-          <p:cNvPr id="155" name="圖片 154">
-            <a:extLst>
-              <a:ext uri="{FF2B5EF4-FFF2-40B4-BE49-F238E27FC236}">
-                <a16:creationId xmlns:a16="http://schemas.microsoft.com/office/drawing/2014/main" id="{A0273641-4D01-4DE3-823F-622661EA125F}"/>
-              </a:ext>
-            </a:extLst>
-          </p:cNvPr>
-          <p:cNvPicPr>
-            <a:picLocks noChangeAspect="1"/>
-          </p:cNvPicPr>
-          <p:nvPr/>
-        </p:nvPicPr>
-        <p:blipFill rotWithShape="1">
-          <a:blip r:embed="rId32">
-            <a:clrChange>
-              <a:clrFrom>
-                <a:srgbClr val="FFFFFF"/>
-              </a:clrFrom>
-              <a:clrTo>
-                <a:srgbClr val="FFFFFF">
-                  <a:alpha val="0"/>
-                </a:srgbClr>
-              </a:clrTo>
-            </a:clrChange>
-            <a:extLst>
-              <a:ext uri="{28A0092B-C50C-407E-A947-70E740481C1C}">
-                <a14:useLocalDpi xmlns:a14="http://schemas.microsoft.com/office/drawing/2010/main" val="0"/>
-              </a:ext>
-            </a:extLst>
-          </a:blip>
-          <a:srcRect t="62100" b="5170"/>
-          <a:stretch/>
-        </p:blipFill>
-        <p:spPr>
-          <a:xfrm>
-            <a:off x="7563816" y="8224671"/>
-            <a:ext cx="2246400" cy="1470467"/>
-          </a:xfrm>
-          <a:prstGeom prst="rect">
-            <a:avLst/>
-          </a:prstGeom>
-        </p:spPr>
-      </p:pic>
-      <p:pic>
-        <p:nvPicPr>
-          <p:cNvPr id="156" name="圖片 155">
-            <a:extLst>
-              <a:ext uri="{FF2B5EF4-FFF2-40B4-BE49-F238E27FC236}">
-                <a16:creationId xmlns:a16="http://schemas.microsoft.com/office/drawing/2014/main" id="{46DDE56D-F31C-4881-A467-666B7925A253}"/>
-              </a:ext>
-            </a:extLst>
-          </p:cNvPr>
-          <p:cNvPicPr>
-            <a:picLocks noChangeAspect="1"/>
-          </p:cNvPicPr>
-          <p:nvPr/>
-        </p:nvPicPr>
-        <p:blipFill rotWithShape="1">
-          <a:blip r:embed="rId33">
-            <a:clrChange>
-              <a:clrFrom>
-                <a:srgbClr val="FFFFFF"/>
-              </a:clrFrom>
-              <a:clrTo>
-                <a:srgbClr val="FFFFFF">
-                  <a:alpha val="0"/>
-                </a:srgbClr>
-              </a:clrTo>
-            </a:clrChange>
-            <a:extLst>
-              <a:ext uri="{28A0092B-C50C-407E-A947-70E740481C1C}">
-                <a14:useLocalDpi xmlns:a14="http://schemas.microsoft.com/office/drawing/2010/main" val="0"/>
-              </a:ext>
-            </a:extLst>
-          </a:blip>
-          <a:srcRect t="37807" b="9415"/>
-          <a:stretch/>
-        </p:blipFill>
-        <p:spPr>
-          <a:xfrm>
-            <a:off x="5768707" y="6517732"/>
-            <a:ext cx="2019600" cy="3199280"/>
-          </a:xfrm>
-          <a:prstGeom prst="rect">
-            <a:avLst/>
-          </a:prstGeom>
-        </p:spPr>
-      </p:pic>
       <p:sp>
         <p:nvSpPr>
           <p:cNvPr id="157" name="矩形 156">
@@ -14719,7 +14355,7 @@
         </p:nvSpPr>
         <p:spPr>
           <a:xfrm>
-            <a:off x="5992576" y="6939548"/>
+            <a:off x="6136955" y="6939548"/>
             <a:ext cx="1396622" cy="707886"/>
           </a:xfrm>
           <a:prstGeom prst="rect">
@@ -15283,8 +14919,8 @@
           </p:sp>
         </mc:Fallback>
       </mc:AlternateContent>
-      <mc:AlternateContent xmlns:mc="http://schemas.openxmlformats.org/markup-compatibility/2006" xmlns:a14="http://schemas.microsoft.com/office/drawing/2010/main">
-        <mc:Choice Requires="a14">
+      <mc:AlternateContent xmlns:mc="http://schemas.openxmlformats.org/markup-compatibility/2006">
+        <mc:Choice xmlns:a14="http://schemas.microsoft.com/office/drawing/2010/main" Requires="a14">
           <p:sp>
             <p:nvSpPr>
               <p:cNvPr id="89" name="矩形: 圓角 88">
@@ -15407,7 +15043,7 @@
             </p:txBody>
           </p:sp>
         </mc:Choice>
-        <mc:Fallback xmlns="">
+        <mc:Fallback>
           <p:sp>
             <p:nvSpPr>
               <p:cNvPr id="89" name="矩形: 圓角 88">
@@ -15625,8 +15261,8 @@
           </p:sp>
         </mc:Fallback>
       </mc:AlternateContent>
-      <mc:AlternateContent xmlns:mc="http://schemas.openxmlformats.org/markup-compatibility/2006">
-        <mc:Choice xmlns:a14="http://schemas.microsoft.com/office/drawing/2010/main" Requires="a14">
+      <mc:AlternateContent xmlns:mc="http://schemas.openxmlformats.org/markup-compatibility/2006" xmlns:a14="http://schemas.microsoft.com/office/drawing/2010/main">
+        <mc:Choice Requires="a14">
           <p:sp>
             <p:nvSpPr>
               <p:cNvPr id="55" name="矩形 54">
@@ -15788,7 +15424,7 @@
             </p:txBody>
           </p:sp>
         </mc:Choice>
-        <mc:Fallback>
+        <mc:Fallback xmlns="">
           <p:sp>
             <p:nvSpPr>
               <p:cNvPr id="55" name="矩形 54">
@@ -15833,8 +15469,8 @@
           </p:sp>
         </mc:Fallback>
       </mc:AlternateContent>
-      <mc:AlternateContent xmlns:mc="http://schemas.openxmlformats.org/markup-compatibility/2006">
-        <mc:Choice xmlns:a14="http://schemas.microsoft.com/office/drawing/2010/main" Requires="a14">
+      <mc:AlternateContent xmlns:mc="http://schemas.openxmlformats.org/markup-compatibility/2006" xmlns:a14="http://schemas.microsoft.com/office/drawing/2010/main">
+        <mc:Choice Requires="a14">
           <p:sp>
             <p:nvSpPr>
               <p:cNvPr id="56" name="矩形 55">
@@ -16078,7 +15714,7 @@
             </p:txBody>
           </p:sp>
         </mc:Choice>
-        <mc:Fallback>
+        <mc:Fallback xmlns="">
           <p:sp>
             <p:nvSpPr>
               <p:cNvPr id="56" name="矩形 55">
@@ -16123,8 +15759,49 @@
           </p:sp>
         </mc:Fallback>
       </mc:AlternateContent>
-      <mc:AlternateContent xmlns:mc="http://schemas.openxmlformats.org/markup-compatibility/2006">
-        <mc:Choice xmlns:a14="http://schemas.microsoft.com/office/drawing/2010/main" Requires="a14">
+      <p:pic>
+        <p:nvPicPr>
+          <p:cNvPr id="95" name="圖片 94">
+            <a:extLst>
+              <a:ext uri="{FF2B5EF4-FFF2-40B4-BE49-F238E27FC236}">
+                <a16:creationId xmlns:a16="http://schemas.microsoft.com/office/drawing/2014/main" id="{AFD7CF11-1F15-4421-80EF-A2D41A217F62}"/>
+              </a:ext>
+            </a:extLst>
+          </p:cNvPr>
+          <p:cNvPicPr>
+            <a:picLocks noChangeAspect="1"/>
+          </p:cNvPicPr>
+          <p:nvPr/>
+        </p:nvPicPr>
+        <p:blipFill>
+          <a:blip r:embed="rId46">
+            <a:clrChange>
+              <a:clrFrom>
+                <a:srgbClr val="FFFFFF"/>
+              </a:clrFrom>
+              <a:clrTo>
+                <a:srgbClr val="FFFFFF">
+                  <a:alpha val="0"/>
+                </a:srgbClr>
+              </a:clrTo>
+            </a:clrChange>
+          </a:blip>
+          <a:stretch>
+            <a:fillRect/>
+          </a:stretch>
+        </p:blipFill>
+        <p:spPr>
+          <a:xfrm>
+            <a:off x="7807891" y="2163779"/>
+            <a:ext cx="1924050" cy="2870391"/>
+          </a:xfrm>
+          <a:prstGeom prst="rect">
+            <a:avLst/>
+          </a:prstGeom>
+        </p:spPr>
+      </p:pic>
+      <mc:AlternateContent xmlns:mc="http://schemas.openxmlformats.org/markup-compatibility/2006" xmlns:a14="http://schemas.microsoft.com/office/drawing/2010/main">
+        <mc:Choice Requires="a14">
           <p:sp>
             <p:nvSpPr>
               <p:cNvPr id="57" name="矩形 56">
@@ -16286,7 +15963,7 @@
             </p:txBody>
           </p:sp>
         </mc:Choice>
-        <mc:Fallback>
+        <mc:Fallback xmlns="">
           <p:sp>
             <p:nvSpPr>
               <p:cNvPr id="57" name="矩形 56">
@@ -16310,7 +15987,7 @@
                 <a:avLst/>
               </a:prstGeom>
               <a:blipFill>
-                <a:blip r:embed="rId46"/>
+                <a:blip r:embed="rId47"/>
                 <a:stretch>
                   <a:fillRect/>
                 </a:stretch>
@@ -16347,7 +16024,7 @@
             </p:nvSpPr>
             <p:spPr>
               <a:xfrm>
-                <a:off x="7590514" y="1280786"/>
+                <a:off x="7590514" y="1214173"/>
                 <a:ext cx="2482440" cy="624273"/>
               </a:xfrm>
               <a:prstGeom prst="rect">
@@ -16593,14 +16270,14 @@
             </p:nvSpPr>
             <p:spPr>
               <a:xfrm>
-                <a:off x="7590514" y="1280786"/>
+                <a:off x="7590514" y="1214173"/>
                 <a:ext cx="2482440" cy="624273"/>
               </a:xfrm>
               <a:prstGeom prst="rect">
                 <a:avLst/>
               </a:prstGeom>
               <a:blipFill>
-                <a:blip r:embed="rId47"/>
+                <a:blip r:embed="rId48"/>
                 <a:stretch>
                   <a:fillRect/>
                 </a:stretch>
@@ -16637,7 +16314,7 @@
             </p:nvSpPr>
             <p:spPr>
               <a:xfrm>
-                <a:off x="1335008" y="5954392"/>
+                <a:off x="1335008" y="5887779"/>
                 <a:ext cx="1105559" cy="555793"/>
               </a:xfrm>
               <a:prstGeom prst="rect">
@@ -16801,14 +16478,14 @@
             </p:nvSpPr>
             <p:spPr>
               <a:xfrm>
-                <a:off x="1335008" y="5954392"/>
+                <a:off x="1335008" y="5887779"/>
                 <a:ext cx="1105559" cy="555793"/>
               </a:xfrm>
               <a:prstGeom prst="rect">
                 <a:avLst/>
               </a:prstGeom>
               <a:blipFill>
-                <a:blip r:embed="rId48"/>
+                <a:blip r:embed="rId49"/>
                 <a:stretch>
                   <a:fillRect/>
                 </a:stretch>
@@ -16845,7 +16522,7 @@
             </p:nvSpPr>
             <p:spPr>
               <a:xfrm>
-                <a:off x="6282612" y="5954392"/>
+                <a:off x="6282612" y="5887779"/>
                 <a:ext cx="1105559" cy="555793"/>
               </a:xfrm>
               <a:prstGeom prst="rect">
@@ -17009,14 +16686,14 @@
             </p:nvSpPr>
             <p:spPr>
               <a:xfrm>
-                <a:off x="6282612" y="5954392"/>
+                <a:off x="6282612" y="5887779"/>
                 <a:ext cx="1105559" cy="555793"/>
               </a:xfrm>
               <a:prstGeom prst="rect">
                 <a:avLst/>
               </a:prstGeom>
               <a:blipFill>
-                <a:blip r:embed="rId49"/>
+                <a:blip r:embed="rId50"/>
                 <a:stretch>
                   <a:fillRect/>
                 </a:stretch>
@@ -17053,7 +16730,7 @@
             </p:nvSpPr>
             <p:spPr>
               <a:xfrm>
-                <a:off x="2611825" y="5920152"/>
+                <a:off x="2611825" y="5853539"/>
                 <a:ext cx="2486552" cy="624273"/>
               </a:xfrm>
               <a:prstGeom prst="rect">
@@ -17299,14 +16976,14 @@
             </p:nvSpPr>
             <p:spPr>
               <a:xfrm>
-                <a:off x="2611825" y="5920152"/>
+                <a:off x="2611825" y="5853539"/>
                 <a:ext cx="2486552" cy="624273"/>
               </a:xfrm>
               <a:prstGeom prst="rect">
                 <a:avLst/>
               </a:prstGeom>
               <a:blipFill>
-                <a:blip r:embed="rId50"/>
+                <a:blip r:embed="rId51"/>
                 <a:stretch>
                   <a:fillRect/>
                 </a:stretch>
@@ -17343,7 +17020,7 @@
             </p:nvSpPr>
             <p:spPr>
               <a:xfrm>
-                <a:off x="7590514" y="5920152"/>
+                <a:off x="7590514" y="5853539"/>
                 <a:ext cx="2482440" cy="624273"/>
               </a:xfrm>
               <a:prstGeom prst="rect">
@@ -17589,14 +17266,14 @@
             </p:nvSpPr>
             <p:spPr>
               <a:xfrm>
-                <a:off x="7590514" y="5920152"/>
+                <a:off x="7590514" y="5853539"/>
                 <a:ext cx="2482440" cy="624273"/>
               </a:xfrm>
               <a:prstGeom prst="rect">
                 <a:avLst/>
               </a:prstGeom>
               <a:blipFill>
-                <a:blip r:embed="rId51"/>
+                <a:blip r:embed="rId52"/>
                 <a:stretch>
                   <a:fillRect/>
                 </a:stretch>
@@ -17617,6 +17294,207 @@
           </p:sp>
         </mc:Fallback>
       </mc:AlternateContent>
+      <p:pic>
+        <p:nvPicPr>
+          <p:cNvPr id="61" name="圖片 60">
+            <a:extLst>
+              <a:ext uri="{FF2B5EF4-FFF2-40B4-BE49-F238E27FC236}">
+                <a16:creationId xmlns:a16="http://schemas.microsoft.com/office/drawing/2014/main" id="{0E942BB8-7831-4103-8474-D538E3C216B4}"/>
+              </a:ext>
+            </a:extLst>
+          </p:cNvPr>
+          <p:cNvPicPr>
+            <a:picLocks noChangeAspect="1"/>
+          </p:cNvPicPr>
+          <p:nvPr/>
+        </p:nvPicPr>
+        <p:blipFill rotWithShape="1">
+          <a:blip r:embed="rId53">
+            <a:clrChange>
+              <a:clrFrom>
+                <a:srgbClr val="FFFFFF"/>
+              </a:clrFrom>
+              <a:clrTo>
+                <a:srgbClr val="FFFFFF">
+                  <a:alpha val="0"/>
+                </a:srgbClr>
+              </a:clrTo>
+            </a:clrChange>
+          </a:blip>
+          <a:srcRect r="20976"/>
+          <a:stretch/>
+        </p:blipFill>
+        <p:spPr>
+          <a:xfrm>
+            <a:off x="1131787" y="6563777"/>
+            <a:ext cx="1422417" cy="3088224"/>
+          </a:xfrm>
+          <a:prstGeom prst="rect">
+            <a:avLst/>
+          </a:prstGeom>
+        </p:spPr>
+      </p:pic>
+      <p:pic>
+        <p:nvPicPr>
+          <p:cNvPr id="65" name="圖片 64">
+            <a:extLst>
+              <a:ext uri="{FF2B5EF4-FFF2-40B4-BE49-F238E27FC236}">
+                <a16:creationId xmlns:a16="http://schemas.microsoft.com/office/drawing/2014/main" id="{2799C00F-592F-4A0A-8D71-2372E63F7296}"/>
+              </a:ext>
+            </a:extLst>
+          </p:cNvPr>
+          <p:cNvPicPr>
+            <a:picLocks noChangeAspect="1"/>
+          </p:cNvPicPr>
+          <p:nvPr/>
+        </p:nvPicPr>
+        <p:blipFill rotWithShape="1">
+          <a:blip r:embed="rId54">
+            <a:clrChange>
+              <a:clrFrom>
+                <a:srgbClr val="FFFFFF"/>
+              </a:clrFrom>
+              <a:clrTo>
+                <a:srgbClr val="FFFFFF">
+                  <a:alpha val="0"/>
+                </a:srgbClr>
+              </a:clrTo>
+            </a:clrChange>
+          </a:blip>
+          <a:srcRect t="319" r="21306" b="1"/>
+          <a:stretch/>
+        </p:blipFill>
+        <p:spPr>
+          <a:xfrm>
+            <a:off x="6140618" y="6591300"/>
+            <a:ext cx="1376111" cy="3065745"/>
+          </a:xfrm>
+          <a:prstGeom prst="rect">
+            <a:avLst/>
+          </a:prstGeom>
+        </p:spPr>
+      </p:pic>
+      <p:pic>
+        <p:nvPicPr>
+          <p:cNvPr id="76" name="圖片 75">
+            <a:extLst>
+              <a:ext uri="{FF2B5EF4-FFF2-40B4-BE49-F238E27FC236}">
+                <a16:creationId xmlns:a16="http://schemas.microsoft.com/office/drawing/2014/main" id="{FD7B8067-B8D8-4B77-B966-1E33D2E56B5E}"/>
+              </a:ext>
+            </a:extLst>
+          </p:cNvPr>
+          <p:cNvPicPr>
+            <a:picLocks noChangeAspect="1"/>
+          </p:cNvPicPr>
+          <p:nvPr/>
+        </p:nvPicPr>
+        <p:blipFill rotWithShape="1">
+          <a:blip r:embed="rId55">
+            <a:clrChange>
+              <a:clrFrom>
+                <a:srgbClr val="FFFFFF"/>
+              </a:clrFrom>
+              <a:clrTo>
+                <a:srgbClr val="FFFFFF">
+                  <a:alpha val="0"/>
+                </a:srgbClr>
+              </a:clrTo>
+            </a:clrChange>
+          </a:blip>
+          <a:srcRect r="22366"/>
+          <a:stretch/>
+        </p:blipFill>
+        <p:spPr>
+          <a:xfrm>
+            <a:off x="6141238" y="1930718"/>
+            <a:ext cx="1356441" cy="3108163"/>
+          </a:xfrm>
+          <a:prstGeom prst="rect">
+            <a:avLst/>
+          </a:prstGeom>
+        </p:spPr>
+      </p:pic>
+      <p:pic>
+        <p:nvPicPr>
+          <p:cNvPr id="83" name="圖片 82">
+            <a:extLst>
+              <a:ext uri="{FF2B5EF4-FFF2-40B4-BE49-F238E27FC236}">
+                <a16:creationId xmlns:a16="http://schemas.microsoft.com/office/drawing/2014/main" id="{A69123A4-B31D-47D6-B2B9-E3D404F42C01}"/>
+              </a:ext>
+            </a:extLst>
+          </p:cNvPr>
+          <p:cNvPicPr>
+            <a:picLocks noChangeAspect="1"/>
+          </p:cNvPicPr>
+          <p:nvPr/>
+        </p:nvPicPr>
+        <p:blipFill rotWithShape="1">
+          <a:blip r:embed="rId56">
+            <a:clrChange>
+              <a:clrFrom>
+                <a:srgbClr val="FFFFFF"/>
+              </a:clrFrom>
+              <a:clrTo>
+                <a:srgbClr val="FFFFFF">
+                  <a:alpha val="0"/>
+                </a:srgbClr>
+              </a:clrTo>
+            </a:clrChange>
+          </a:blip>
+          <a:srcRect t="50126"/>
+          <a:stretch/>
+        </p:blipFill>
+        <p:spPr>
+          <a:xfrm>
+            <a:off x="7783107" y="8255000"/>
+            <a:ext cx="1802897" cy="1377364"/>
+          </a:xfrm>
+          <a:prstGeom prst="rect">
+            <a:avLst/>
+          </a:prstGeom>
+        </p:spPr>
+      </p:pic>
+      <p:pic>
+        <p:nvPicPr>
+          <p:cNvPr id="92" name="圖片 91">
+            <a:extLst>
+              <a:ext uri="{FF2B5EF4-FFF2-40B4-BE49-F238E27FC236}">
+                <a16:creationId xmlns:a16="http://schemas.microsoft.com/office/drawing/2014/main" id="{CAAB28D2-BB02-4ED8-A429-980E1B9230B3}"/>
+              </a:ext>
+            </a:extLst>
+          </p:cNvPr>
+          <p:cNvPicPr>
+            <a:picLocks noChangeAspect="1"/>
+          </p:cNvPicPr>
+          <p:nvPr/>
+        </p:nvPicPr>
+        <p:blipFill>
+          <a:blip r:embed="rId57">
+            <a:clrChange>
+              <a:clrFrom>
+                <a:srgbClr val="FFFFFF"/>
+              </a:clrFrom>
+              <a:clrTo>
+                <a:srgbClr val="FFFFFF">
+                  <a:alpha val="0"/>
+                </a:srgbClr>
+              </a:clrTo>
+            </a:clrChange>
+          </a:blip>
+          <a:stretch>
+            <a:fillRect/>
+          </a:stretch>
+        </p:blipFill>
+        <p:spPr>
+          <a:xfrm>
+            <a:off x="2659045" y="6573946"/>
+            <a:ext cx="2143051" cy="1530015"/>
+          </a:xfrm>
+          <a:prstGeom prst="rect">
+            <a:avLst/>
+          </a:prstGeom>
+        </p:spPr>
+      </p:pic>
     </p:spTree>
     <p:extLst>
       <p:ext uri="{BB962C8B-B14F-4D97-AF65-F5344CB8AC3E}">

--- a/Final/Figures/wavepacket_l=0.pptx
+++ b/Final/Figures/wavepacket_l=0.pptx
@@ -253,7 +253,7 @@
           <a:p>
             <a:fld id="{B4A272A4-1B6B-4C0A-B74D-70EF2D8C7D55}" type="datetimeFigureOut">
               <a:rPr lang="zh-TW" altLang="en-US" smtClean="0"/>
-              <a:t>2026/10/6</a:t>
+              <a:t>2026/10/12</a:t>
             </a:fld>
             <a:endParaRPr lang="zh-TW" altLang="en-US"/>
           </a:p>
@@ -423,7 +423,7 @@
           <a:p>
             <a:fld id="{B4A272A4-1B6B-4C0A-B74D-70EF2D8C7D55}" type="datetimeFigureOut">
               <a:rPr lang="zh-TW" altLang="en-US" smtClean="0"/>
-              <a:t>2026/10/6</a:t>
+              <a:t>2026/10/12</a:t>
             </a:fld>
             <a:endParaRPr lang="zh-TW" altLang="en-US"/>
           </a:p>
@@ -603,7 +603,7 @@
           <a:p>
             <a:fld id="{B4A272A4-1B6B-4C0A-B74D-70EF2D8C7D55}" type="datetimeFigureOut">
               <a:rPr lang="zh-TW" altLang="en-US" smtClean="0"/>
-              <a:t>2026/10/6</a:t>
+              <a:t>2026/10/12</a:t>
             </a:fld>
             <a:endParaRPr lang="zh-TW" altLang="en-US"/>
           </a:p>
@@ -773,7 +773,7 @@
           <a:p>
             <a:fld id="{B4A272A4-1B6B-4C0A-B74D-70EF2D8C7D55}" type="datetimeFigureOut">
               <a:rPr lang="zh-TW" altLang="en-US" smtClean="0"/>
-              <a:t>2026/10/6</a:t>
+              <a:t>2026/10/12</a:t>
             </a:fld>
             <a:endParaRPr lang="zh-TW" altLang="en-US"/>
           </a:p>
@@ -1017,7 +1017,7 @@
           <a:p>
             <a:fld id="{B4A272A4-1B6B-4C0A-B74D-70EF2D8C7D55}" type="datetimeFigureOut">
               <a:rPr lang="zh-TW" altLang="en-US" smtClean="0"/>
-              <a:t>2026/10/6</a:t>
+              <a:t>2026/10/12</a:t>
             </a:fld>
             <a:endParaRPr lang="zh-TW" altLang="en-US"/>
           </a:p>
@@ -1249,7 +1249,7 @@
           <a:p>
             <a:fld id="{B4A272A4-1B6B-4C0A-B74D-70EF2D8C7D55}" type="datetimeFigureOut">
               <a:rPr lang="zh-TW" altLang="en-US" smtClean="0"/>
-              <a:t>2026/10/6</a:t>
+              <a:t>2026/10/12</a:t>
             </a:fld>
             <a:endParaRPr lang="zh-TW" altLang="en-US"/>
           </a:p>
@@ -1616,7 +1616,7 @@
           <a:p>
             <a:fld id="{B4A272A4-1B6B-4C0A-B74D-70EF2D8C7D55}" type="datetimeFigureOut">
               <a:rPr lang="zh-TW" altLang="en-US" smtClean="0"/>
-              <a:t>2026/10/6</a:t>
+              <a:t>2026/10/12</a:t>
             </a:fld>
             <a:endParaRPr lang="zh-TW" altLang="en-US"/>
           </a:p>
@@ -1734,7 +1734,7 @@
           <a:p>
             <a:fld id="{B4A272A4-1B6B-4C0A-B74D-70EF2D8C7D55}" type="datetimeFigureOut">
               <a:rPr lang="zh-TW" altLang="en-US" smtClean="0"/>
-              <a:t>2026/10/6</a:t>
+              <a:t>2026/10/12</a:t>
             </a:fld>
             <a:endParaRPr lang="zh-TW" altLang="en-US"/>
           </a:p>
@@ -1829,7 +1829,7 @@
           <a:p>
             <a:fld id="{B4A272A4-1B6B-4C0A-B74D-70EF2D8C7D55}" type="datetimeFigureOut">
               <a:rPr lang="zh-TW" altLang="en-US" smtClean="0"/>
-              <a:t>2026/10/6</a:t>
+              <a:t>2026/10/12</a:t>
             </a:fld>
             <a:endParaRPr lang="zh-TW" altLang="en-US"/>
           </a:p>
@@ -2106,7 +2106,7 @@
           <a:p>
             <a:fld id="{B4A272A4-1B6B-4C0A-B74D-70EF2D8C7D55}" type="datetimeFigureOut">
               <a:rPr lang="zh-TW" altLang="en-US" smtClean="0"/>
-              <a:t>2026/10/6</a:t>
+              <a:t>2026/10/12</a:t>
             </a:fld>
             <a:endParaRPr lang="zh-TW" altLang="en-US"/>
           </a:p>
@@ -2363,7 +2363,7 @@
           <a:p>
             <a:fld id="{B4A272A4-1B6B-4C0A-B74D-70EF2D8C7D55}" type="datetimeFigureOut">
               <a:rPr lang="zh-TW" altLang="en-US" smtClean="0"/>
-              <a:t>2026/10/6</a:t>
+              <a:t>2026/10/12</a:t>
             </a:fld>
             <a:endParaRPr lang="zh-TW" altLang="en-US"/>
           </a:p>
@@ -2576,7 +2576,7 @@
           <a:p>
             <a:fld id="{B4A272A4-1B6B-4C0A-B74D-70EF2D8C7D55}" type="datetimeFigureOut">
               <a:rPr lang="zh-TW" altLang="en-US" smtClean="0"/>
-              <a:t>2026/10/6</a:t>
+              <a:t>2026/10/12</a:t>
             </a:fld>
             <a:endParaRPr lang="zh-TW" altLang="en-US"/>
           </a:p>
@@ -13645,8 +13645,8 @@
           </a:p>
         </p:txBody>
       </p:sp>
-      <mc:AlternateContent xmlns:mc="http://schemas.openxmlformats.org/markup-compatibility/2006">
-        <mc:Choice xmlns:a14="http://schemas.microsoft.com/office/drawing/2010/main" Requires="a14">
+      <mc:AlternateContent xmlns:mc="http://schemas.openxmlformats.org/markup-compatibility/2006" xmlns:a14="http://schemas.microsoft.com/office/drawing/2010/main">
+        <mc:Choice Requires="a14">
           <p:sp>
             <p:nvSpPr>
               <p:cNvPr id="118" name="矩形 117">
@@ -13710,7 +13710,7 @@
             </p:txBody>
           </p:sp>
         </mc:Choice>
-        <mc:Fallback>
+        <mc:Fallback xmlns="">
           <p:sp>
             <p:nvSpPr>
               <p:cNvPr id="118" name="矩形 117">
@@ -13755,8 +13755,8 @@
           </p:sp>
         </mc:Fallback>
       </mc:AlternateContent>
-      <mc:AlternateContent xmlns:mc="http://schemas.openxmlformats.org/markup-compatibility/2006">
-        <mc:Choice xmlns:a14="http://schemas.microsoft.com/office/drawing/2010/main" Requires="a14">
+      <mc:AlternateContent xmlns:mc="http://schemas.openxmlformats.org/markup-compatibility/2006" xmlns:a14="http://schemas.microsoft.com/office/drawing/2010/main">
+        <mc:Choice Requires="a14">
           <p:sp>
             <p:nvSpPr>
               <p:cNvPr id="119" name="矩形 118">
@@ -13826,7 +13826,7 @@
             </p:txBody>
           </p:sp>
         </mc:Choice>
-        <mc:Fallback>
+        <mc:Fallback xmlns="">
           <p:sp>
             <p:nvSpPr>
               <p:cNvPr id="119" name="矩形 118">
@@ -14011,8 +14011,8 @@
           </a:p>
         </p:txBody>
       </p:sp>
-      <mc:AlternateContent xmlns:mc="http://schemas.openxmlformats.org/markup-compatibility/2006">
-        <mc:Choice xmlns:a14="http://schemas.microsoft.com/office/drawing/2010/main" Requires="a14">
+      <mc:AlternateContent xmlns:mc="http://schemas.openxmlformats.org/markup-compatibility/2006" xmlns:a14="http://schemas.microsoft.com/office/drawing/2010/main">
+        <mc:Choice Requires="a14">
           <p:sp>
             <p:nvSpPr>
               <p:cNvPr id="138" name="矩形 137">
@@ -14076,7 +14076,7 @@
             </p:txBody>
           </p:sp>
         </mc:Choice>
-        <mc:Fallback>
+        <mc:Fallback xmlns="">
           <p:sp>
             <p:nvSpPr>
               <p:cNvPr id="138" name="矩形 137">
@@ -14121,8 +14121,8 @@
           </p:sp>
         </mc:Fallback>
       </mc:AlternateContent>
-      <mc:AlternateContent xmlns:mc="http://schemas.openxmlformats.org/markup-compatibility/2006">
-        <mc:Choice xmlns:a14="http://schemas.microsoft.com/office/drawing/2010/main" Requires="a14">
+      <mc:AlternateContent xmlns:mc="http://schemas.openxmlformats.org/markup-compatibility/2006" xmlns:a14="http://schemas.microsoft.com/office/drawing/2010/main">
+        <mc:Choice Requires="a14">
           <p:sp>
             <p:nvSpPr>
               <p:cNvPr id="139" name="矩形 138">
@@ -14192,7 +14192,7 @@
             </p:txBody>
           </p:sp>
         </mc:Choice>
-        <mc:Fallback>
+        <mc:Fallback xmlns="">
           <p:sp>
             <p:nvSpPr>
               <p:cNvPr id="139" name="矩形 138">
@@ -14919,8 +14919,8 @@
           </p:sp>
         </mc:Fallback>
       </mc:AlternateContent>
-      <mc:AlternateContent xmlns:mc="http://schemas.openxmlformats.org/markup-compatibility/2006">
-        <mc:Choice xmlns:a14="http://schemas.microsoft.com/office/drawing/2010/main" Requires="a14">
+      <mc:AlternateContent xmlns:mc="http://schemas.openxmlformats.org/markup-compatibility/2006" xmlns:a14="http://schemas.microsoft.com/office/drawing/2010/main">
+        <mc:Choice Requires="a14">
           <p:sp>
             <p:nvSpPr>
               <p:cNvPr id="89" name="矩形: 圓角 88">
@@ -15043,7 +15043,7 @@
             </p:txBody>
           </p:sp>
         </mc:Choice>
-        <mc:Fallback>
+        <mc:Fallback xmlns="">
           <p:sp>
             <p:nvSpPr>
               <p:cNvPr id="89" name="矩形: 圓角 88">
@@ -16008,8 +16008,8 @@
           </p:sp>
         </mc:Fallback>
       </mc:AlternateContent>
-      <mc:AlternateContent xmlns:mc="http://schemas.openxmlformats.org/markup-compatibility/2006">
-        <mc:Choice xmlns:a14="http://schemas.microsoft.com/office/drawing/2010/main" Requires="a14">
+      <mc:AlternateContent xmlns:mc="http://schemas.openxmlformats.org/markup-compatibility/2006" xmlns:a14="http://schemas.microsoft.com/office/drawing/2010/main">
+        <mc:Choice Requires="a14">
           <p:sp>
             <p:nvSpPr>
               <p:cNvPr id="77" name="矩形 76">
@@ -16253,7 +16253,7 @@
             </p:txBody>
           </p:sp>
         </mc:Choice>
-        <mc:Fallback>
+        <mc:Fallback xmlns="">
           <p:sp>
             <p:nvSpPr>
               <p:cNvPr id="77" name="矩形 76">
@@ -16298,8 +16298,8 @@
           </p:sp>
         </mc:Fallback>
       </mc:AlternateContent>
-      <mc:AlternateContent xmlns:mc="http://schemas.openxmlformats.org/markup-compatibility/2006">
-        <mc:Choice xmlns:a14="http://schemas.microsoft.com/office/drawing/2010/main" Requires="a14">
+      <mc:AlternateContent xmlns:mc="http://schemas.openxmlformats.org/markup-compatibility/2006" xmlns:a14="http://schemas.microsoft.com/office/drawing/2010/main">
+        <mc:Choice Requires="a14">
           <p:sp>
             <p:nvSpPr>
               <p:cNvPr id="90" name="矩形 89">
@@ -16461,7 +16461,7 @@
             </p:txBody>
           </p:sp>
         </mc:Choice>
-        <mc:Fallback>
+        <mc:Fallback xmlns="">
           <p:sp>
             <p:nvSpPr>
               <p:cNvPr id="90" name="矩形 89">
@@ -16506,8 +16506,8 @@
           </p:sp>
         </mc:Fallback>
       </mc:AlternateContent>
-      <mc:AlternateContent xmlns:mc="http://schemas.openxmlformats.org/markup-compatibility/2006">
-        <mc:Choice xmlns:a14="http://schemas.microsoft.com/office/drawing/2010/main" Requires="a14">
+      <mc:AlternateContent xmlns:mc="http://schemas.openxmlformats.org/markup-compatibility/2006" xmlns:a14="http://schemas.microsoft.com/office/drawing/2010/main">
+        <mc:Choice Requires="a14">
           <p:sp>
             <p:nvSpPr>
               <p:cNvPr id="93" name="矩形 92">
@@ -16669,7 +16669,7 @@
             </p:txBody>
           </p:sp>
         </mc:Choice>
-        <mc:Fallback>
+        <mc:Fallback xmlns="">
           <p:sp>
             <p:nvSpPr>
               <p:cNvPr id="93" name="矩形 92">
@@ -16714,8 +16714,8 @@
           </p:sp>
         </mc:Fallback>
       </mc:AlternateContent>
-      <mc:AlternateContent xmlns:mc="http://schemas.openxmlformats.org/markup-compatibility/2006">
-        <mc:Choice xmlns:a14="http://schemas.microsoft.com/office/drawing/2010/main" Requires="a14">
+      <mc:AlternateContent xmlns:mc="http://schemas.openxmlformats.org/markup-compatibility/2006" xmlns:a14="http://schemas.microsoft.com/office/drawing/2010/main">
+        <mc:Choice Requires="a14">
           <p:sp>
             <p:nvSpPr>
               <p:cNvPr id="59" name="矩形 58">
@@ -16959,7 +16959,7 @@
             </p:txBody>
           </p:sp>
         </mc:Choice>
-        <mc:Fallback>
+        <mc:Fallback xmlns="">
           <p:sp>
             <p:nvSpPr>
               <p:cNvPr id="59" name="矩形 58">
@@ -17004,8 +17004,8 @@
           </p:sp>
         </mc:Fallback>
       </mc:AlternateContent>
-      <mc:AlternateContent xmlns:mc="http://schemas.openxmlformats.org/markup-compatibility/2006">
-        <mc:Choice xmlns:a14="http://schemas.microsoft.com/office/drawing/2010/main" Requires="a14">
+      <mc:AlternateContent xmlns:mc="http://schemas.openxmlformats.org/markup-compatibility/2006" xmlns:a14="http://schemas.microsoft.com/office/drawing/2010/main">
+        <mc:Choice Requires="a14">
           <p:sp>
             <p:nvSpPr>
               <p:cNvPr id="60" name="矩形 59">
@@ -17249,7 +17249,7 @@
             </p:txBody>
           </p:sp>
         </mc:Choice>
-        <mc:Fallback>
+        <mc:Fallback xmlns="">
           <p:sp>
             <p:nvSpPr>
               <p:cNvPr id="60" name="矩形 59">
